--- a/budget-transfer/kickoff/IT予算移管_キックオフ_2026-11-02.pptx
+++ b/budget-transfer/kickoff/IT予算移管_キックオフ_2026-11-02.pptx
@@ -13,6 +13,7 @@
     <p:sldId id="261" r:id="rId7"/>
     <p:sldId id="262" r:id="rId8"/>
     <p:sldId id="263" r:id="rId9"/>
+    <p:sldId id="264" r:id="rId15"/>
   </p:sldIdLst>
   <p:notesMasterIdLst>
     <p:notesMasterId r:id="rId10"/>
@@ -8734,79 +8735,6 @@
       </p:sp>
       <p:sp>
         <p:nvSpPr>
-          <p:cNvPr id="48" name="noteline-191"/>
-          <p:cNvSpPr/>
-          <p:nvPr/>
-        </p:nvSpPr>
-        <p:spPr>
-          <a:xfrm>
-            <a:off x="457200" y="5870448"/>
-            <a:ext cx="11274552" cy="0"/>
-          </a:xfrm>
-          <a:prstGeom prst="line">
-            <a:avLst/>
-          </a:prstGeom>
-          <a:noFill/>
-          <a:ln w="9525">
-            <a:solidFill>
-              <a:schemeClr val="accent3"/>
-            </a:solidFill>
-            <a:prstDash val="solid"/>
-          </a:ln>
-        </p:spPr>
-      </p:sp>
-      <p:sp>
-        <p:nvSpPr>
-          <p:cNvPr id="49" name="txt-192"/>
-          <p:cNvSpPr txBox="1"/>
-          <p:nvPr/>
-        </p:nvSpPr>
-        <p:spPr>
-          <a:xfrm>
-            <a:off x="457200" y="5961888"/>
-            <a:ext cx="11274552" cy="411480"/>
-          </a:xfrm>
-          <a:prstGeom prst="rect">
-            <a:avLst/>
-          </a:prstGeom>
-          <a:noFill/>
-          <a:ln/>
-        </p:spPr>
-        <p:txBody>
-          <a:bodyPr wrap="square" lIns="0" tIns="0" rIns="0" bIns="0" rtlCol="0" anchor="t"/>
-          <a:lstStyle/>
-          <a:p>
-            <a:pPr indent="0" marL="0">
-              <a:buNone/>
-            </a:pPr>
-            <a:r>
-              <a:rPr lang="en-US" sz="900" dirty="0">
-                <a:solidFill>
-                  <a:schemeClr val="accent2"/>
-                </a:solidFill>
-              </a:rPr>
-              <a:t>参照（GxP）：EU GMP Annex 11（2011年、2025年改訂案）、PIC/S PI 011-3、厚生労働省「コンピュータ化システム適正管理ガイドライン」</a:t>
-            </a:r>
-            <a:endParaRPr lang="en-US" sz="900" dirty="0"/>
-          </a:p>
-          <a:p>
-            <a:pPr indent="0" marL="0">
-              <a:buNone/>
-            </a:pPr>
-            <a:r>
-              <a:rPr lang="en-US" sz="900" dirty="0">
-                <a:solidFill>
-                  <a:schemeClr val="accent2"/>
-                </a:solidFill>
-              </a:rPr>
-              <a:t>参照（内部統制）：金融庁「財務報告に係る内部統制の評価及び監査の基準・実施基準」、経済産業省「システム管理基準 追補版（財務報告に係るIT統制ガイダンス）」「システム管理基準」</a:t>
-            </a:r>
-            <a:endParaRPr lang="en-US" sz="900" dirty="0"/>
-          </a:p>
-        </p:txBody>
-      </p:sp>
-      <p:sp>
-        <p:nvSpPr>
           <p:cNvPr id="25" name="Slide Number Placeholder 0"/>
           <p:cNvSpPr>
             <a:spLocks noGrp="1"/>
@@ -20609,6 +20537,815 @@
             <a:fld id="{F7021451-1387-4CA6-816F-3879F97B5CBC}" type="slidenum">
               <a:rPr b="0" lang="en-US"/>
               <a:t>8</a:t>
+            </a:fld>
+            <a:endParaRPr lang="en-US"/>
+          </a:p>
+        </p:txBody>
+      </p:sp>
+    </p:spTree>
+  </p:cSld>
+  <p:clrMapOvr>
+    <a:masterClrMapping/>
+  </p:clrMapOvr>
+</p:sld>
+</file>
+
+<file path=ppt/slides/slide9.xml><?xml version="1.0" encoding="utf-8"?>
+<p:sld xmlns:a="http://schemas.openxmlformats.org/drawingml/2006/main" xmlns:p="http://schemas.openxmlformats.org/presentationml/2006/main" xmlns:r="http://schemas.openxmlformats.org/officeDocument/2006/relationships">
+  <p:cSld>
+    <p:spTree>
+      <p:nvGrpSpPr>
+        <p:cNvPr id="1" name=""/>
+        <p:cNvGrpSpPr/>
+        <p:nvPr/>
+      </p:nvGrpSpPr>
+      <p:grpSpPr/>
+      <p:sp>
+        <p:nvSpPr>
+          <p:cNvPr id="101" name="Text 0"/>
+          <p:cNvSpPr/>
+          <p:nvPr>
+            <p:ph idx="100" type="title" hasCustomPrompt="1"/>
+          </p:nvPr>
+        </p:nvSpPr>
+        <p:spPr>
+          <a:xfrm>
+            <a:off x="457200" y="274320"/>
+            <a:ext cx="11274552" cy="594360"/>
+          </a:xfrm>
+          <a:prstGeom prst="rect">
+            <a:avLst/>
+          </a:prstGeom>
+          <a:noFill/>
+          <a:ln/>
+        </p:spPr>
+        <p:txBody>
+          <a:bodyPr wrap="square" lIns="0" tIns="0" rIns="0" bIns="0" rtlCol="0" anchor="ctr"/>
+          <a:lstStyle/>
+          <a:p>
+            <a:pPr algn="l" indent="0" marL="0">
+              <a:buNone/>
+            </a:pPr>
+            <a:r>
+              <a:rPr lang="en-US" sz="2600" b="1" dirty="0">
+                <a:solidFill>
+                  <a:schemeClr val="tx2"/>
+                </a:solidFill>
+              </a:rPr>
+              <a:t>提言：IT予算は「分けて」持つ</a:t>
+            </a:r>
+            <a:endParaRPr lang="en-US" sz="2600" dirty="0"/>
+          </a:p>
+        </p:txBody>
+      </p:sp>
+      <p:sp>
+        <p:nvSpPr>
+          <p:cNvPr id="102" name="txt-146"/>
+          <p:cNvSpPr txBox="1"/>
+          <p:nvPr/>
+        </p:nvSpPr>
+        <p:spPr>
+          <a:xfrm>
+            <a:off x="457200" y="914400"/>
+            <a:ext cx="11274552" cy="457200"/>
+          </a:xfrm>
+          <a:prstGeom prst="rect">
+            <a:avLst/>
+          </a:prstGeom>
+          <a:noFill/>
+          <a:ln/>
+        </p:spPr>
+        <p:txBody>
+          <a:bodyPr wrap="square" lIns="0" tIns="0" rIns="0" bIns="0" rtlCol="0" anchor="ctr"/>
+          <a:lstStyle/>
+          <a:p>
+            <a:pPr indent="0" marL="0">
+              <a:buNone/>
+            </a:pPr>
+            <a:r>
+              <a:rPr lang="en-US" sz="1300" b="1" dirty="0">
+                <a:solidFill>
+                  <a:schemeClr val="tx2"/>
+                </a:solidFill>
+              </a:rPr>
+              <a:t>「事業側か、IT部門側か」の二択にしない。お金・契約・事務は IT部門に、業務の最終責任（A）は事業側に置く。そのための4つの条件</a:t>
+            </a:r>
+            <a:endParaRPr lang="en-US" sz="1400" dirty="0"/>
+          </a:p>
+        </p:txBody>
+      </p:sp>
+      <p:sp>
+        <p:nvSpPr>
+          <p:cNvPr id="103" name="box-18"/>
+          <p:cNvSpPr/>
+          <p:nvPr/>
+        </p:nvSpPr>
+        <p:spPr>
+          <a:xfrm>
+            <a:off x="457200" y="1536192"/>
+            <a:ext cx="5545836" cy="2395728"/>
+          </a:xfrm>
+          <a:prstGeom prst="rect">
+            <a:avLst/>
+          </a:prstGeom>
+          <a:solidFill>
+            <a:schemeClr val="bg2"/>
+          </a:solidFill>
+          <a:ln/>
+        </p:spPr>
+      </p:sp>
+      <p:sp>
+        <p:nvSpPr>
+          <p:cNvPr id="104" name="txt-19"/>
+          <p:cNvSpPr txBox="1"/>
+          <p:nvPr/>
+        </p:nvSpPr>
+        <p:spPr>
+          <a:xfrm>
+            <a:off x="658368" y="1673351"/>
+            <a:ext cx="5143500" cy="329184"/>
+          </a:xfrm>
+          <a:prstGeom prst="rect">
+            <a:avLst/>
+          </a:prstGeom>
+          <a:noFill/>
+          <a:ln/>
+        </p:spPr>
+        <p:txBody>
+          <a:bodyPr wrap="square" lIns="0" tIns="0" rIns="0" bIns="0" rtlCol="0" anchor="t"/>
+          <a:lstStyle/>
+          <a:p>
+            <a:pPr indent="0" marL="0">
+              <a:buNone/>
+            </a:pPr>
+            <a:r>
+              <a:rPr lang="en-US" sz="1500" b="1" dirty="0">
+                <a:solidFill>
+                  <a:schemeClr val="tx2"/>
+                </a:solidFill>
+              </a:rPr>
+              <a:t>①　予算と責任を分ける理由</a:t>
+            </a:r>
+            <a:endParaRPr lang="en-US" sz="1500" dirty="0"/>
+          </a:p>
+        </p:txBody>
+      </p:sp>
+      <p:sp>
+        <p:nvSpPr>
+          <p:cNvPr id="105" name="txt-20"/>
+          <p:cNvSpPr txBox="1"/>
+          <p:nvPr/>
+        </p:nvSpPr>
+        <p:spPr>
+          <a:xfrm>
+            <a:off x="658368" y="2020824"/>
+            <a:ext cx="5143500" cy="274320"/>
+          </a:xfrm>
+          <a:prstGeom prst="rect">
+            <a:avLst/>
+          </a:prstGeom>
+          <a:noFill/>
+          <a:ln/>
+        </p:spPr>
+        <p:txBody>
+          <a:bodyPr wrap="square" lIns="0" tIns="0" rIns="0" bIns="0" rtlCol="0" anchor="t"/>
+          <a:lstStyle/>
+          <a:p>
+            <a:pPr indent="0" marL="0">
+              <a:buNone/>
+            </a:pPr>
+            <a:r>
+              <a:rPr lang="en-US" sz="1200" b="1" dirty="0">
+                <a:solidFill>
+                  <a:schemeClr val="accent2"/>
+                </a:solidFill>
+              </a:rPr>
+              <a:t>お金の流れは IT部門に集め、業務の判断は事業側に残す</a:t>
+            </a:r>
+            <a:endParaRPr lang="en-US" sz="1100" dirty="0"/>
+          </a:p>
+        </p:txBody>
+      </p:sp>
+      <p:sp>
+        <p:nvSpPr>
+          <p:cNvPr id="106" name="txt-21"/>
+          <p:cNvSpPr txBox="1"/>
+          <p:nvPr/>
+        </p:nvSpPr>
+        <p:spPr>
+          <a:xfrm>
+            <a:off x="658368" y="2377440"/>
+            <a:ext cx="5143500" cy="1481328"/>
+          </a:xfrm>
+          <a:prstGeom prst="rect">
+            <a:avLst/>
+          </a:prstGeom>
+          <a:noFill/>
+          <a:ln/>
+        </p:spPr>
+        <p:txBody>
+          <a:bodyPr wrap="square" lIns="0" tIns="0" rIns="0" bIns="0" rtlCol="0" anchor="t"/>
+          <a:lstStyle/>
+          <a:p>
+            <a:pPr marL="152400" indent="-152400">
+              <a:spcAft>
+                <a:spcPts val="300"/>
+              </a:spcAft>
+              <a:buSzPct val="100000"/>
+              <a:buChar char="•"/>
+            </a:pPr>
+            <a:r>
+              <a:rPr lang="en-US" sz="1200" dirty="0">
+                <a:solidFill>
+                  <a:schemeClr val="tx1"/>
+                </a:solidFill>
+              </a:rPr>
+              <a:t>IT部門に集めるのは予算・契約・間接業務。全社共通の基盤への影響の統制、ベンダーとの交渉力、重複の排除、IT費用の全社での可視化のため</a:t>
+            </a:r>
+            <a:endParaRPr lang="en-US" sz="1100" dirty="0"/>
+          </a:p>
+          <a:p>
+            <a:pPr marL="152400" indent="-152400">
+              <a:spcAft>
+                <a:spcPts val="300"/>
+              </a:spcAft>
+              <a:buSzPct val="100000"/>
+              <a:buChar char="•"/>
+            </a:pPr>
+            <a:r>
+              <a:rPr lang="en-US" sz="1200" dirty="0">
+                <a:solidFill>
+                  <a:schemeClr val="tx1"/>
+                </a:solidFill>
+              </a:rPr>
+              <a:t>業務アプリケーションの要否・要件・受け入れは、業務を知る側にしか判断できない。A は事業側に残す（プロセスオーナー原則）</a:t>
+            </a:r>
+            <a:endParaRPr lang="en-US" sz="1100" dirty="0"/>
+          </a:p>
+          <a:p>
+            <a:pPr marL="152400" indent="-152400">
+              <a:spcAft>
+                <a:spcPts val="300"/>
+              </a:spcAft>
+              <a:buSzPct val="100000"/>
+              <a:buChar char="•"/>
+            </a:pPr>
+            <a:r>
+              <a:rPr lang="en-US" sz="1200" dirty="0">
+                <a:solidFill>
+                  <a:schemeClr val="tx1"/>
+                </a:solidFill>
+              </a:rPr>
+              <a:t>問うべきは「どちらが持つか」ではなく「何をどちらが持つか」</a:t>
+            </a:r>
+            <a:endParaRPr lang="en-US" sz="1100" dirty="0"/>
+          </a:p>
+        </p:txBody>
+      </p:sp>
+      <p:sp>
+        <p:nvSpPr>
+          <p:cNvPr id="107" name="box-18"/>
+          <p:cNvSpPr/>
+          <p:nvPr/>
+        </p:nvSpPr>
+        <p:spPr>
+          <a:xfrm>
+            <a:off x="6185916" y="1536192"/>
+            <a:ext cx="5545836" cy="2395728"/>
+          </a:xfrm>
+          <a:prstGeom prst="rect">
+            <a:avLst/>
+          </a:prstGeom>
+          <a:solidFill>
+            <a:schemeClr val="bg2"/>
+          </a:solidFill>
+          <a:ln/>
+        </p:spPr>
+      </p:sp>
+      <p:sp>
+        <p:nvSpPr>
+          <p:cNvPr id="108" name="txt-19"/>
+          <p:cNvSpPr txBox="1"/>
+          <p:nvPr/>
+        </p:nvSpPr>
+        <p:spPr>
+          <a:xfrm>
+            <a:off x="6387084" y="1673351"/>
+            <a:ext cx="5143500" cy="329184"/>
+          </a:xfrm>
+          <a:prstGeom prst="rect">
+            <a:avLst/>
+          </a:prstGeom>
+          <a:noFill/>
+          <a:ln/>
+        </p:spPr>
+        <p:txBody>
+          <a:bodyPr wrap="square" lIns="0" tIns="0" rIns="0" bIns="0" rtlCol="0" anchor="t"/>
+          <a:lstStyle/>
+          <a:p>
+            <a:pPr indent="0" marL="0">
+              <a:buNone/>
+            </a:pPr>
+            <a:r>
+              <a:rPr lang="en-US" sz="1500" b="1" dirty="0">
+                <a:solidFill>
+                  <a:schemeClr val="tx2"/>
+                </a:solidFill>
+              </a:rPr>
+              <a:t>②　配分権の帰属</a:t>
+            </a:r>
+            <a:endParaRPr lang="en-US" sz="1500" dirty="0"/>
+          </a:p>
+        </p:txBody>
+      </p:sp>
+      <p:sp>
+        <p:nvSpPr>
+          <p:cNvPr id="109" name="txt-20"/>
+          <p:cNvSpPr txBox="1"/>
+          <p:nvPr/>
+        </p:nvSpPr>
+        <p:spPr>
+          <a:xfrm>
+            <a:off x="6387084" y="2020824"/>
+            <a:ext cx="5143500" cy="274320"/>
+          </a:xfrm>
+          <a:prstGeom prst="rect">
+            <a:avLst/>
+          </a:prstGeom>
+          <a:noFill/>
+          <a:ln/>
+        </p:spPr>
+        <p:txBody>
+          <a:bodyPr wrap="square" lIns="0" tIns="0" rIns="0" bIns="0" rtlCol="0" anchor="t"/>
+          <a:lstStyle/>
+          <a:p>
+            <a:pPr indent="0" marL="0">
+              <a:buNone/>
+            </a:pPr>
+            <a:r>
+              <a:rPr lang="en-US" sz="1200" b="1" dirty="0">
+                <a:solidFill>
+                  <a:schemeClr val="accent2"/>
+                </a:solidFill>
+              </a:rPr>
+              <a:t>枠は全社で決め、枠の中の優先順位は事業側が決める</a:t>
+            </a:r>
+            <a:endParaRPr lang="en-US" sz="1100" dirty="0"/>
+          </a:p>
+        </p:txBody>
+      </p:sp>
+      <p:sp>
+        <p:nvSpPr>
+          <p:cNvPr id="110" name="txt-21"/>
+          <p:cNvSpPr txBox="1"/>
+          <p:nvPr/>
+        </p:nvSpPr>
+        <p:spPr>
+          <a:xfrm>
+            <a:off x="6387084" y="2377440"/>
+            <a:ext cx="5143500" cy="1481328"/>
+          </a:xfrm>
+          <a:prstGeom prst="rect">
+            <a:avLst/>
+          </a:prstGeom>
+          <a:noFill/>
+          <a:ln/>
+        </p:spPr>
+        <p:txBody>
+          <a:bodyPr wrap="square" lIns="0" tIns="0" rIns="0" bIns="0" rtlCol="0" anchor="t"/>
+          <a:lstStyle/>
+          <a:p>
+            <a:pPr marL="152400" indent="-152400">
+              <a:spcAft>
+                <a:spcPts val="300"/>
+              </a:spcAft>
+              <a:buSzPct val="100000"/>
+              <a:buChar char="•"/>
+            </a:pPr>
+            <a:r>
+              <a:rPr lang="en-US" sz="1200" dirty="0">
+                <a:solidFill>
+                  <a:schemeClr val="tx1"/>
+                </a:solidFill>
+              </a:rPr>
+              <a:t>部門ごとの予算の枠と投資の決裁は、新しいITガバナンス（Tier）で決める</a:t>
+            </a:r>
+            <a:endParaRPr lang="en-US" sz="1100" dirty="0"/>
+          </a:p>
+          <a:p>
+            <a:pPr marL="152400" indent="-152400">
+              <a:spcAft>
+                <a:spcPts val="300"/>
+              </a:spcAft>
+              <a:buSzPct val="100000"/>
+              <a:buChar char="•"/>
+            </a:pPr>
+            <a:r>
+              <a:rPr lang="en-US" sz="1200" dirty="0">
+                <a:solidFill>
+                  <a:schemeClr val="tx1"/>
+                </a:solidFill>
+              </a:rPr>
+              <a:t>枠の中でどの案件を優先するかは、ビジネスオーナー（BO）が決める</a:t>
+            </a:r>
+            <a:endParaRPr lang="en-US" sz="1100" dirty="0"/>
+          </a:p>
+          <a:p>
+            <a:pPr marL="152400" indent="-152400">
+              <a:spcAft>
+                <a:spcPts val="300"/>
+              </a:spcAft>
+              <a:buSzPct val="100000"/>
+              <a:buChar char="•"/>
+            </a:pPr>
+            <a:r>
+              <a:rPr lang="en-US" sz="1200" dirty="0">
+                <a:solidFill>
+                  <a:schemeClr val="tx1"/>
+                </a:solidFill>
+              </a:rPr>
+              <a:t>IT部門（SO）は費用の妥当性と既存システムとの整合を評価し、異を唱える。合意できなければ Tier に上げる（IT部門が単独で止めない）</a:t>
+            </a:r>
+            <a:endParaRPr lang="en-US" sz="1100" dirty="0"/>
+          </a:p>
+        </p:txBody>
+      </p:sp>
+      <p:sp>
+        <p:nvSpPr>
+          <p:cNvPr id="111" name="box-18"/>
+          <p:cNvSpPr/>
+          <p:nvPr/>
+        </p:nvSpPr>
+        <p:spPr>
+          <a:xfrm>
+            <a:off x="457200" y="4069080"/>
+            <a:ext cx="5545836" cy="2395728"/>
+          </a:xfrm>
+          <a:prstGeom prst="rect">
+            <a:avLst/>
+          </a:prstGeom>
+          <a:solidFill>
+            <a:schemeClr val="bg2"/>
+          </a:solidFill>
+          <a:ln/>
+        </p:spPr>
+      </p:sp>
+      <p:sp>
+        <p:nvSpPr>
+          <p:cNvPr id="112" name="txt-19"/>
+          <p:cNvSpPr txBox="1"/>
+          <p:nvPr/>
+        </p:nvSpPr>
+        <p:spPr>
+          <a:xfrm>
+            <a:off x="658368" y="4206240"/>
+            <a:ext cx="5143500" cy="329184"/>
+          </a:xfrm>
+          <a:prstGeom prst="rect">
+            <a:avLst/>
+          </a:prstGeom>
+          <a:noFill/>
+          <a:ln/>
+        </p:spPr>
+        <p:txBody>
+          <a:bodyPr wrap="square" lIns="0" tIns="0" rIns="0" bIns="0" rtlCol="0" anchor="t"/>
+          <a:lstStyle/>
+          <a:p>
+            <a:pPr indent="0" marL="0">
+              <a:buNone/>
+            </a:pPr>
+            <a:r>
+              <a:rPr lang="en-US" sz="1500" b="1" dirty="0">
+                <a:solidFill>
+                  <a:schemeClr val="tx2"/>
+                </a:solidFill>
+              </a:rPr>
+              <a:t>③　コスト意識の歯止め</a:t>
+            </a:r>
+            <a:endParaRPr lang="en-US" sz="1500" dirty="0"/>
+          </a:p>
+        </p:txBody>
+      </p:sp>
+      <p:sp>
+        <p:nvSpPr>
+          <p:cNvPr id="113" name="txt-20"/>
+          <p:cNvSpPr txBox="1"/>
+          <p:nvPr/>
+        </p:nvSpPr>
+        <p:spPr>
+          <a:xfrm>
+            <a:off x="658368" y="4553712"/>
+            <a:ext cx="5143500" cy="274320"/>
+          </a:xfrm>
+          <a:prstGeom prst="rect">
+            <a:avLst/>
+          </a:prstGeom>
+          <a:noFill/>
+          <a:ln/>
+        </p:spPr>
+        <p:txBody>
+          <a:bodyPr wrap="square" lIns="0" tIns="0" rIns="0" bIns="0" rtlCol="0" anchor="t"/>
+          <a:lstStyle/>
+          <a:p>
+            <a:pPr indent="0" marL="0">
+              <a:buNone/>
+            </a:pPr>
+            <a:r>
+              <a:rPr lang="en-US" sz="1200" b="1" dirty="0">
+                <a:solidFill>
+                  <a:schemeClr val="accent2"/>
+                </a:solidFill>
+              </a:rPr>
+              <a:t>払わなくなっても、使った費用は部門に見せる</a:t>
+            </a:r>
+            <a:endParaRPr lang="en-US" sz="1100" dirty="0"/>
+          </a:p>
+        </p:txBody>
+      </p:sp>
+      <p:sp>
+        <p:nvSpPr>
+          <p:cNvPr id="114" name="txt-21"/>
+          <p:cNvSpPr txBox="1"/>
+          <p:nvPr/>
+        </p:nvSpPr>
+        <p:spPr>
+          <a:xfrm>
+            <a:off x="658368" y="4910328"/>
+            <a:ext cx="5143500" cy="1481328"/>
+          </a:xfrm>
+          <a:prstGeom prst="rect">
+            <a:avLst/>
+          </a:prstGeom>
+          <a:noFill/>
+          <a:ln/>
+        </p:spPr>
+        <p:txBody>
+          <a:bodyPr wrap="square" lIns="0" tIns="0" rIns="0" bIns="0" rtlCol="0" anchor="t"/>
+          <a:lstStyle/>
+          <a:p>
+            <a:pPr marL="152400" indent="-152400">
+              <a:spcAft>
+                <a:spcPts val="300"/>
+              </a:spcAft>
+              <a:buSzPct val="100000"/>
+              <a:buChar char="•"/>
+            </a:pPr>
+            <a:r>
+              <a:rPr lang="en-US" sz="1200" dirty="0">
+                <a:solidFill>
+                  <a:schemeClr val="tx1"/>
+                </a:solidFill>
+              </a:rPr>
+              <a:t>移管した費用を、部門別・案件別に毎期示す（単価と内訳の開示）</a:t>
+            </a:r>
+            <a:endParaRPr lang="en-US" sz="1100" dirty="0"/>
+          </a:p>
+          <a:p>
+            <a:pPr marL="152400" indent="-152400">
+              <a:spcAft>
+                <a:spcPts val="300"/>
+              </a:spcAft>
+              <a:buSzPct val="100000"/>
+              <a:buChar char="•"/>
+            </a:pPr>
+            <a:r>
+              <a:rPr lang="en-US" sz="1200" dirty="0">
+                <a:solidFill>
+                  <a:schemeClr val="tx1"/>
+                </a:solidFill>
+              </a:rPr>
+              <a:t>削減した費用の一部を部門に返す（比率は未定）</a:t>
+            </a:r>
+            <a:endParaRPr lang="en-US" sz="1100" dirty="0"/>
+          </a:p>
+          <a:p>
+            <a:pPr marL="152400" indent="-152400">
+              <a:spcAft>
+                <a:spcPts val="300"/>
+              </a:spcAft>
+              <a:buSzPct val="100000"/>
+              <a:buChar char="•"/>
+            </a:pPr>
+            <a:r>
+              <a:rPr lang="en-US" sz="1200" dirty="0">
+                <a:solidFill>
+                  <a:schemeClr val="tx1"/>
+                </a:solidFill>
+              </a:rPr>
+              <a:t>配賦・チャージバックに進むかは、1年分の実績を見て判断する</a:t>
+            </a:r>
+            <a:endParaRPr lang="en-US" sz="1100" dirty="0"/>
+          </a:p>
+        </p:txBody>
+      </p:sp>
+      <p:sp>
+        <p:nvSpPr>
+          <p:cNvPr id="115" name="box-18"/>
+          <p:cNvSpPr/>
+          <p:nvPr/>
+        </p:nvSpPr>
+        <p:spPr>
+          <a:xfrm>
+            <a:off x="6185916" y="4069080"/>
+            <a:ext cx="5545836" cy="2395728"/>
+          </a:xfrm>
+          <a:prstGeom prst="rect">
+            <a:avLst/>
+          </a:prstGeom>
+          <a:solidFill>
+            <a:schemeClr val="bg2"/>
+          </a:solidFill>
+          <a:ln/>
+        </p:spPr>
+      </p:sp>
+      <p:sp>
+        <p:nvSpPr>
+          <p:cNvPr id="116" name="txt-19"/>
+          <p:cNvSpPr txBox="1"/>
+          <p:nvPr/>
+        </p:nvSpPr>
+        <p:spPr>
+          <a:xfrm>
+            <a:off x="6387084" y="4206240"/>
+            <a:ext cx="5143500" cy="329184"/>
+          </a:xfrm>
+          <a:prstGeom prst="rect">
+            <a:avLst/>
+          </a:prstGeom>
+          <a:noFill/>
+          <a:ln/>
+        </p:spPr>
+        <p:txBody>
+          <a:bodyPr wrap="square" lIns="0" tIns="0" rIns="0" bIns="0" rtlCol="0" anchor="t"/>
+          <a:lstStyle/>
+          <a:p>
+            <a:pPr indent="0" marL="0">
+              <a:buNone/>
+            </a:pPr>
+            <a:r>
+              <a:rPr lang="en-US" sz="1500" b="1" dirty="0">
+                <a:solidFill>
+                  <a:schemeClr val="tx2"/>
+                </a:solidFill>
+              </a:rPr>
+              <a:t>④　中間層の移行期限</a:t>
+            </a:r>
+            <a:endParaRPr lang="en-US" sz="1500" dirty="0"/>
+          </a:p>
+        </p:txBody>
+      </p:sp>
+      <p:sp>
+        <p:nvSpPr>
+          <p:cNvPr id="117" name="txt-20"/>
+          <p:cNvSpPr txBox="1"/>
+          <p:nvPr/>
+        </p:nvSpPr>
+        <p:spPr>
+          <a:xfrm>
+            <a:off x="6387084" y="4553712"/>
+            <a:ext cx="5143500" cy="274320"/>
+          </a:xfrm>
+          <a:prstGeom prst="rect">
+            <a:avLst/>
+          </a:prstGeom>
+          <a:noFill/>
+          <a:ln/>
+        </p:spPr>
+        <p:txBody>
+          <a:bodyPr wrap="square" lIns="0" tIns="0" rIns="0" bIns="0" rtlCol="0" anchor="t"/>
+          <a:lstStyle/>
+          <a:p>
+            <a:pPr indent="0" marL="0">
+              <a:buNone/>
+            </a:pPr>
+            <a:r>
+              <a:rPr lang="en-US" sz="1200" b="1" dirty="0">
+                <a:solidFill>
+                  <a:schemeClr val="accent2"/>
+                </a:solidFill>
+              </a:rPr>
+              <a:t>IT関連業務の R は、期限を切って IT部門に移す</a:t>
+            </a:r>
+            <a:endParaRPr lang="en-US" sz="1100" dirty="0"/>
+          </a:p>
+        </p:txBody>
+      </p:sp>
+      <p:sp>
+        <p:nvSpPr>
+          <p:cNvPr id="118" name="txt-21"/>
+          <p:cNvSpPr txBox="1"/>
+          <p:nvPr/>
+        </p:nvSpPr>
+        <p:spPr>
+          <a:xfrm>
+            <a:off x="6387084" y="4910328"/>
+            <a:ext cx="5143500" cy="1481328"/>
+          </a:xfrm>
+          <a:prstGeom prst="rect">
+            <a:avLst/>
+          </a:prstGeom>
+          <a:noFill/>
+          <a:ln/>
+        </p:spPr>
+        <p:txBody>
+          <a:bodyPr wrap="square" lIns="0" tIns="0" rIns="0" bIns="0" rtlCol="0" anchor="t"/>
+          <a:lstStyle/>
+          <a:p>
+            <a:pPr marL="152400" indent="-152400">
+              <a:spcAft>
+                <a:spcPts val="300"/>
+              </a:spcAft>
+              <a:buSzPct val="100000"/>
+              <a:buChar char="•"/>
+            </a:pPr>
+            <a:r>
+              <a:rPr lang="en-US" sz="1200" dirty="0">
+                <a:solidFill>
+                  <a:schemeClr val="tx1"/>
+                </a:solidFill>
+              </a:rPr>
+              <a:t>SO が R を持ち始める時期に上限を置く（例：次回の契約更新、遅くとも2027年度末）</a:t>
+            </a:r>
+            <a:endParaRPr lang="en-US" sz="1100" dirty="0"/>
+          </a:p>
+          <a:p>
+            <a:pPr marL="152400" indent="-152400">
+              <a:spcAft>
+                <a:spcPts val="300"/>
+              </a:spcAft>
+              <a:buSzPct val="100000"/>
+              <a:buChar char="•"/>
+            </a:pPr>
+            <a:r>
+              <a:rPr lang="en-US" sz="1200" dirty="0">
+                <a:solidFill>
+                  <a:schemeClr val="tx1"/>
+                </a:solidFill>
+              </a:rPr>
+              <a:t>上限を越えて Before のまま残す業務は、理由を合意文書に書き、進行役が横並びで確かめる</a:t>
+            </a:r>
+            <a:endParaRPr lang="en-US" sz="1100" dirty="0"/>
+          </a:p>
+          <a:p>
+            <a:pPr marL="152400" indent="-152400">
+              <a:spcAft>
+                <a:spcPts val="300"/>
+              </a:spcAft>
+              <a:buSzPct val="100000"/>
+              <a:buChar char="•"/>
+            </a:pPr>
+            <a:r>
+              <a:rPr lang="en-US" sz="1200" dirty="0">
+                <a:solidFill>
+                  <a:schemeClr val="tx1"/>
+                </a:solidFill>
+              </a:rPr>
+              <a:t>上限がないと、移るのは帳簿と事務だけになり、統制の目的を果たせない</a:t>
+            </a:r>
+            <a:endParaRPr lang="en-US" sz="1100" dirty="0"/>
+          </a:p>
+        </p:txBody>
+      </p:sp>
+      <p:sp>
+        <p:nvSpPr>
+          <p:cNvPr id="119" name="Slide Number Placeholder 0"/>
+          <p:cNvSpPr>
+            <a:spLocks noGrp="1"/>
+          </p:cNvSpPr>
+          <p:nvPr>
+            <p:ph type="sldNum" sz="quarter" idx="4294967295"/>
+          </p:nvPr>
+        </p:nvSpPr>
+        <p:spPr>
+          <a:xfrm>
+            <a:off x="11274552" y="6446520"/>
+            <a:ext cx="457200" cy="274320"/>
+          </a:xfrm>
+          <a:prstGeom prst="rect">
+            <a:avLst/>
+          </a:prstGeom>
+          <a:extLst>
+            <a:ext uri="{C572A759-6A51-4108-AA02-DFA0A04FC94B}">
+              <ma14:wrappingTextBoxFlag xmlns:ma14="http://schemas.microsoft.com/office/mac/drawingml/2011/main" val="0"/>
+            </a:ext>
+          </a:extLst>
+        </p:spPr>
+        <p:txBody>
+          <a:bodyPr/>
+          <a:lstStyle>
+            <a:lvl1pPr>
+              <a:defRPr sz="900">
+                <a:solidFill>
+                  <a:schemeClr val="accent3"/>
+                </a:solidFill>
+              </a:defRPr>
+            </a:lvl1pPr>
+          </a:lstStyle>
+          <a:p>
+            <a:pPr algn="r"/>
+            <a:fld id="{F7021451-1387-4CA6-816F-3879F97B5CBC}" type="slidenum">
+              <a:rPr b="0" lang="en-US"/>
+              <a:t>9</a:t>
             </a:fld>
             <a:endParaRPr lang="en-US"/>
           </a:p>
